--- a/public/难得读书-竞赛PPT.pptx
+++ b/public/难得读书-竞赛PPT.pptx
@@ -5707,7 +5707,7 @@
                 </a:solidFill>
                 <a:latin typeface="Microsoft YaHei"/>
               </a:rPr>
-              <a:t>一个已经跑通的完整体验</a:t>
+              <a:t>从“照见自己”，到“互相看见”</a:t>
             </a:r>
           </a:p>
         </p:txBody>
@@ -5764,8 +5764,8 @@
         </p:nvSpPr>
         <p:spPr>
           <a:xfrm>
-            <a:off x="914400" y="1600200"/>
-            <a:ext cx="10424160" cy="502920"/>
+            <a:off x="640080" y="1600200"/>
+            <a:ext cx="10972800" cy="457200"/>
           </a:xfrm>
           <a:prstGeom prst="rect">
             <a:avLst/>
@@ -5787,22 +5787,13 @@
               </a:spcAft>
             </a:pPr>
             <a:r>
-              <a:rPr sz="1500" b="1">
-                <a:solidFill>
-                  <a:srgbClr val="14B8A6"/>
+              <a:rPr sz="1700" b="1">
+                <a:solidFill>
+                  <a:srgbClr val="0B6B57"/>
                 </a:solidFill>
                 <a:latin typeface="Microsoft YaHei"/>
               </a:rPr>
-              <a:t>• </a:t>
-            </a:r>
-            <a:r>
-              <a:rPr sz="1500" b="0">
-                <a:solidFill>
-                  <a:srgbClr val="3A4A47"/>
-                </a:solidFill>
-                <a:latin typeface="Microsoft YaHei"/>
-              </a:rPr>
-              <a:t>覆盖数十部中外经典，每本多个可选角色，支持自填角色</a:t>
+              <a:t>两个人各走一遍 · 照见我们</a:t>
             </a:r>
           </a:p>
         </p:txBody>
@@ -5815,7 +5806,7 @@
         </p:nvSpPr>
         <p:spPr>
           <a:xfrm>
-            <a:off x="914400" y="2112264"/>
+            <a:off x="914400" y="2103120"/>
             <a:ext cx="10424160" cy="502920"/>
           </a:xfrm>
           <a:prstGeom prst="rect">
@@ -5853,7 +5844,7 @@
                 </a:solidFill>
                 <a:latin typeface="Microsoft YaHei"/>
               </a:rPr>
-              <a:t>因果连贯的剧情推演，拒绝凭空转折</a:t>
+              <a:t>情侣 / 朋友 / 同事读同一本书、附身同一个角色，并排看两份价值观画像：我们哪里像、哪里不一样、为什么</a:t>
             </a:r>
           </a:p>
         </p:txBody>
@@ -5866,8 +5857,8 @@
         </p:nvSpPr>
         <p:spPr>
           <a:xfrm>
-            <a:off x="914400" y="2624328"/>
-            <a:ext cx="10424160" cy="502920"/>
+            <a:off x="640080" y="2752344"/>
+            <a:ext cx="10972800" cy="457200"/>
           </a:xfrm>
           <a:prstGeom prst="rect">
             <a:avLst/>
@@ -5889,22 +5880,13 @@
               </a:spcAft>
             </a:pPr>
             <a:r>
-              <a:rPr sz="1500" b="1">
-                <a:solidFill>
-                  <a:srgbClr val="14B8A6"/>
+              <a:rPr sz="1700" b="1">
+                <a:solidFill>
+                  <a:srgbClr val="0B6B57"/>
                 </a:solidFill>
                 <a:latin typeface="Microsoft YaHei"/>
               </a:rPr>
-              <a:t>• </a:t>
-            </a:r>
-            <a:r>
-              <a:rPr sz="1500" b="0">
-                <a:solidFill>
-                  <a:srgbClr val="3A4A47"/>
-                </a:solidFill>
-                <a:latin typeface="Microsoft YaHei"/>
-              </a:rPr>
-              <a:t>“极端选择付出代价但不中断”，人人都能走到属于自己的结局报告</a:t>
+              <a:t>一群人共读一本 · 互相看见</a:t>
             </a:r>
           </a:p>
         </p:txBody>
@@ -5917,7 +5899,7 @@
         </p:nvSpPr>
         <p:spPr>
           <a:xfrm>
-            <a:off x="914400" y="3136392"/>
+            <a:off x="914400" y="3255264"/>
             <a:ext cx="10424160" cy="502920"/>
           </a:xfrm>
           <a:prstGeom prst="rect">
@@ -5955,7 +5937,7 @@
                 </a:solidFill>
                 <a:latin typeface="Microsoft YaHei"/>
               </a:rPr>
-              <a:t>结局镜像报告：把角色一生的命题，轻轻折射回你自己的现实</a:t>
+              <a:t>读书会 / 班级 / 家庭各走一遍同一角色，聚在一起看：谁的选择最不一样，那个“异类”背后是什么价值观</a:t>
             </a:r>
           </a:p>
         </p:txBody>
@@ -5968,8 +5950,8 @@
         </p:nvSpPr>
         <p:spPr>
           <a:xfrm>
-            <a:off x="914400" y="3648456"/>
-            <a:ext cx="10424160" cy="502920"/>
+            <a:off x="640080" y="3904488"/>
+            <a:ext cx="10972800" cy="457200"/>
           </a:xfrm>
           <a:prstGeom prst="rect">
             <a:avLst/>
@@ -5991,80 +5973,27 @@
               </a:spcAft>
             </a:pPr>
             <a:r>
-              <a:rPr sz="1500" b="1">
-                <a:solidFill>
-                  <a:srgbClr val="14B8A6"/>
+              <a:rPr sz="1700" b="1">
+                <a:solidFill>
+                  <a:srgbClr val="0B6B57"/>
                 </a:solidFill>
                 <a:latin typeface="Microsoft YaHei"/>
               </a:rPr>
-              <a:t>• </a:t>
-            </a:r>
-            <a:r>
-              <a:rPr sz="1500" b="0">
-                <a:solidFill>
-                  <a:srgbClr val="3A4A47"/>
-                </a:solidFill>
-                <a:latin typeface="Microsoft YaHei"/>
-              </a:rPr>
-              <a:t>移动端优先，扫码即玩，可分享故事与结果</a:t>
-            </a:r>
-          </a:p>
-        </p:txBody>
-      </p:sp>
-      <p:sp>
-        <p:nvSpPr>
-          <p:cNvPr id="11" name="Rounded Rectangle 10"/>
-          <p:cNvSpPr/>
-          <p:nvPr/>
-        </p:nvSpPr>
-        <p:spPr>
-          <a:xfrm>
-            <a:off x="640080" y="5806440"/>
-            <a:ext cx="10972800" cy="685800"/>
-          </a:xfrm>
-          <a:prstGeom prst="roundRect">
-            <a:avLst/>
-          </a:prstGeom>
-          <a:solidFill>
-            <a:srgbClr val="E9FCF5"/>
-          </a:solidFill>
-          <a:ln>
-            <a:noFill/>
-          </a:ln>
-          <a:effectLst/>
-        </p:spPr>
-        <p:style>
-          <a:lnRef idx="1">
-            <a:schemeClr val="accent1"/>
-          </a:lnRef>
-          <a:fillRef idx="3">
-            <a:schemeClr val="accent1"/>
-          </a:fillRef>
-          <a:effectRef idx="2">
-            <a:schemeClr val="accent1"/>
-          </a:effectRef>
-          <a:fontRef idx="minor">
-            <a:schemeClr val="lt1"/>
-          </a:fontRef>
-        </p:style>
-        <p:txBody>
-          <a:bodyPr rtlCol="0" anchor="ctr"/>
-          <a:lstStyle/>
-          <a:p>
-            <a:pPr algn="ctr"/>
-          </a:p>
-        </p:txBody>
-      </p:sp>
-      <p:sp>
-        <p:nvSpPr>
-          <p:cNvPr id="12" name="TextBox 11"/>
+              <a:t>一条成长曲线 · 看见自己的变化</a:t>
+            </a:r>
+          </a:p>
+        </p:txBody>
+      </p:sp>
+      <p:sp>
+        <p:nvSpPr>
+          <p:cNvPr id="11" name="TextBox 10"/>
           <p:cNvSpPr txBox="1"/>
           <p:nvPr/>
         </p:nvSpPr>
         <p:spPr>
           <a:xfrm>
-            <a:off x="868680" y="5870448"/>
-            <a:ext cx="10515600" cy="566928"/>
+            <a:off x="914400" y="4407408"/>
+            <a:ext cx="10424160" cy="502920"/>
           </a:xfrm>
           <a:prstGeom prst="rect">
             <a:avLst/>
@@ -6072,7 +6001,7 @@
           <a:noFill/>
         </p:spPr>
         <p:txBody>
-          <a:bodyPr wrap="square" anchor="ctr">
+          <a:bodyPr wrap="square" anchor="t">
             <a:spAutoFit/>
           </a:bodyPr>
           <a:lstStyle/>
@@ -6088,18 +6017,113 @@
             <a:r>
               <a:rPr sz="1500" b="1">
                 <a:solidFill>
-                  <a:srgbClr val="06463C"/>
+                  <a:srgbClr val="14B8A6"/>
                 </a:solidFill>
                 <a:latin typeface="Microsoft YaHei"/>
               </a:rPr>
-              <a:t>建议配图：手机端截图 —— 选书页 / 剧情页 / 结果报告页</a:t>
-            </a:r>
+              <a:t>• </a:t>
+            </a:r>
+            <a:r>
+              <a:rPr sz="1500" b="0">
+                <a:solidFill>
+                  <a:srgbClr val="3A4A47"/>
+                </a:solidFill>
+                <a:latin typeface="Microsoft YaHei"/>
+              </a:rPr>
+              <a:t>多次游玩沉淀成一条价值观轨迹——半年后回看，“我，变了没有？”</a:t>
+            </a:r>
+          </a:p>
+        </p:txBody>
+      </p:sp>
+      <p:sp>
+        <p:nvSpPr>
+          <p:cNvPr id="12" name="Rounded Rectangle 11"/>
+          <p:cNvSpPr/>
+          <p:nvPr/>
+        </p:nvSpPr>
+        <p:spPr>
+          <a:xfrm>
+            <a:off x="640080" y="5806440"/>
+            <a:ext cx="10972800" cy="685800"/>
+          </a:xfrm>
+          <a:prstGeom prst="roundRect">
+            <a:avLst/>
+          </a:prstGeom>
+          <a:solidFill>
+            <a:srgbClr val="E9FCF5"/>
+          </a:solidFill>
+          <a:ln>
+            <a:noFill/>
+          </a:ln>
+          <a:effectLst/>
+        </p:spPr>
+        <p:style>
+          <a:lnRef idx="1">
+            <a:schemeClr val="accent1"/>
+          </a:lnRef>
+          <a:fillRef idx="3">
+            <a:schemeClr val="accent1"/>
+          </a:fillRef>
+          <a:effectRef idx="2">
+            <a:schemeClr val="accent1"/>
+          </a:effectRef>
+          <a:fontRef idx="minor">
+            <a:schemeClr val="lt1"/>
+          </a:fontRef>
+        </p:style>
+        <p:txBody>
+          <a:bodyPr rtlCol="0" anchor="ctr"/>
+          <a:lstStyle/>
+          <a:p>
+            <a:pPr algn="ctr"/>
           </a:p>
         </p:txBody>
       </p:sp>
       <p:sp>
         <p:nvSpPr>
           <p:cNvPr id="13" name="TextBox 12"/>
+          <p:cNvSpPr txBox="1"/>
+          <p:nvPr/>
+        </p:nvSpPr>
+        <p:spPr>
+          <a:xfrm>
+            <a:off x="868680" y="5870448"/>
+            <a:ext cx="10515600" cy="566928"/>
+          </a:xfrm>
+          <a:prstGeom prst="rect">
+            <a:avLst/>
+          </a:prstGeom>
+          <a:noFill/>
+        </p:spPr>
+        <p:txBody>
+          <a:bodyPr wrap="square" anchor="ctr">
+            <a:spAutoFit/>
+          </a:bodyPr>
+          <a:lstStyle/>
+          <a:p>
+            <a:pPr algn="l">
+              <a:lnSpc>
+                <a:spcPct val="115000"/>
+              </a:lnSpc>
+              <a:spcAft>
+                <a:spcPts val="600"/>
+              </a:spcAft>
+            </a:pPr>
+            <a:r>
+              <a:rPr sz="1500" b="1">
+                <a:solidFill>
+                  <a:srgbClr val="06463C"/>
+                </a:solidFill>
+                <a:latin typeface="Microsoft YaHei"/>
+              </a:rPr>
+              <a:t>从“读一本书”，到“一群人借一本书，照见彼此”——书，成了人与人之间那面共同的镜子。</a:t>
+            </a:r>
+          </a:p>
+        </p:txBody>
+      </p:sp>
+      <p:sp>
+        <p:nvSpPr>
+          <p:cNvPr id="14" name="TextBox 13"/>
           <p:cNvSpPr txBox="1"/>
           <p:nvPr/>
         </p:nvSpPr>
